--- a/docs/pptx/entire/ritu-entire-cox-linear-ratio-death.pptx
+++ b/docs/pptx/entire/ritu-entire-cox-linear-ratio-death.pptx
@@ -2960,539 +2960,539 @@
           <p:spPr>
             <a:xfrm>
               <a:off x="1172049" y="2073503"/>
-              <a:ext cx="7090630" cy="3450954"/>
+              <a:ext cx="7090630" cy="3451268"/>
             </a:xfrm>
             <a:custGeom>
               <a:avLst/>
               <a:pathLst>
-                <a:path w="7090630" h="3450954">
+                <a:path w="7090630" h="3451268">
                   <a:moveTo>
-                    <a:pt x="1783998" y="0"/>
+                    <a:pt x="1788709" y="0"/>
                   </a:moveTo>
                   <a:lnTo>
-                    <a:pt x="1790563" y="20630"/>
-                  </a:lnTo>
-                  <a:lnTo>
-                    <a:pt x="1862185" y="231976"/>
-                  </a:lnTo>
-                  <a:lnTo>
-                    <a:pt x="1933808" y="430424"/>
-                  </a:lnTo>
-                  <a:lnTo>
-                    <a:pt x="2005430" y="616761"/>
-                  </a:lnTo>
-                  <a:lnTo>
-                    <a:pt x="2077053" y="791726"/>
-                  </a:lnTo>
-                  <a:lnTo>
-                    <a:pt x="2148675" y="956014"/>
-                  </a:lnTo>
-                  <a:lnTo>
-                    <a:pt x="2220298" y="1110275"/>
-                  </a:lnTo>
-                  <a:lnTo>
-                    <a:pt x="2291920" y="1255123"/>
-                  </a:lnTo>
-                  <a:lnTo>
-                    <a:pt x="2363543" y="1391131"/>
-                  </a:lnTo>
-                  <a:lnTo>
-                    <a:pt x="2435165" y="1518838"/>
-                  </a:lnTo>
-                  <a:lnTo>
-                    <a:pt x="2506788" y="1638752"/>
-                  </a:lnTo>
-                  <a:lnTo>
-                    <a:pt x="2578410" y="1751347"/>
-                  </a:lnTo>
-                  <a:lnTo>
-                    <a:pt x="2650033" y="1857072"/>
-                  </a:lnTo>
-                  <a:lnTo>
-                    <a:pt x="2721655" y="1956344"/>
-                  </a:lnTo>
-                  <a:lnTo>
-                    <a:pt x="2793278" y="2049558"/>
-                  </a:lnTo>
-                  <a:lnTo>
-                    <a:pt x="2864901" y="2137083"/>
-                  </a:lnTo>
-                  <a:lnTo>
-                    <a:pt x="2936523" y="2219266"/>
-                  </a:lnTo>
-                  <a:lnTo>
-                    <a:pt x="3008146" y="2296435"/>
-                  </a:lnTo>
-                  <a:lnTo>
-                    <a:pt x="3079768" y="2368894"/>
-                  </a:lnTo>
-                  <a:lnTo>
-                    <a:pt x="3151391" y="2436930"/>
-                  </a:lnTo>
-                  <a:lnTo>
-                    <a:pt x="3223013" y="2500815"/>
-                  </a:lnTo>
-                  <a:lnTo>
-                    <a:pt x="3294636" y="2560801"/>
-                  </a:lnTo>
-                  <a:lnTo>
-                    <a:pt x="3366258" y="2617126"/>
-                  </a:lnTo>
-                  <a:lnTo>
-                    <a:pt x="3437881" y="2660622"/>
-                  </a:lnTo>
-                  <a:lnTo>
-                    <a:pt x="3509503" y="2681130"/>
-                  </a:lnTo>
-                  <a:lnTo>
-                    <a:pt x="3581126" y="2701128"/>
-                  </a:lnTo>
-                  <a:lnTo>
-                    <a:pt x="3652748" y="2720626"/>
-                  </a:lnTo>
-                  <a:lnTo>
-                    <a:pt x="3724371" y="2739640"/>
-                  </a:lnTo>
-                  <a:lnTo>
-                    <a:pt x="3795993" y="2758179"/>
-                  </a:lnTo>
-                  <a:lnTo>
-                    <a:pt x="3867616" y="2776257"/>
-                  </a:lnTo>
-                  <a:lnTo>
-                    <a:pt x="3939238" y="2793884"/>
-                  </a:lnTo>
-                  <a:lnTo>
-                    <a:pt x="4010861" y="2811072"/>
-                  </a:lnTo>
-                  <a:lnTo>
-                    <a:pt x="4082483" y="2827831"/>
-                  </a:lnTo>
-                  <a:lnTo>
-                    <a:pt x="4154106" y="2844173"/>
-                  </a:lnTo>
-                  <a:lnTo>
-                    <a:pt x="4225729" y="2860108"/>
-                  </a:lnTo>
-                  <a:lnTo>
-                    <a:pt x="4297351" y="2875646"/>
-                  </a:lnTo>
-                  <a:lnTo>
-                    <a:pt x="4368974" y="2890797"/>
-                  </a:lnTo>
-                  <a:lnTo>
-                    <a:pt x="4440596" y="2905570"/>
-                  </a:lnTo>
-                  <a:lnTo>
-                    <a:pt x="4512219" y="2919976"/>
-                  </a:lnTo>
-                  <a:lnTo>
-                    <a:pt x="4583841" y="2934022"/>
-                  </a:lnTo>
-                  <a:lnTo>
-                    <a:pt x="4655464" y="2947718"/>
-                  </a:lnTo>
-                  <a:lnTo>
-                    <a:pt x="4727086" y="2961073"/>
-                  </a:lnTo>
-                  <a:lnTo>
-                    <a:pt x="4798709" y="2974096"/>
-                  </a:lnTo>
-                  <a:lnTo>
-                    <a:pt x="4870331" y="2986794"/>
-                  </a:lnTo>
-                  <a:lnTo>
-                    <a:pt x="4941954" y="2999175"/>
-                  </a:lnTo>
-                  <a:lnTo>
-                    <a:pt x="5013576" y="3011248"/>
-                  </a:lnTo>
-                  <a:lnTo>
-                    <a:pt x="5085199" y="3023021"/>
-                  </a:lnTo>
-                  <a:lnTo>
-                    <a:pt x="5156821" y="3034500"/>
-                  </a:lnTo>
-                  <a:lnTo>
-                    <a:pt x="5228444" y="3045693"/>
-                  </a:lnTo>
-                  <a:lnTo>
-                    <a:pt x="5300066" y="3056607"/>
-                  </a:lnTo>
-                  <a:lnTo>
-                    <a:pt x="5371689" y="3067249"/>
-                  </a:lnTo>
-                  <a:lnTo>
-                    <a:pt x="5443311" y="3077626"/>
-                  </a:lnTo>
-                  <a:lnTo>
-                    <a:pt x="5514934" y="3087744"/>
-                  </a:lnTo>
-                  <a:lnTo>
-                    <a:pt x="5586557" y="3097611"/>
-                  </a:lnTo>
-                  <a:lnTo>
-                    <a:pt x="5658179" y="3107231"/>
-                  </a:lnTo>
-                  <a:lnTo>
-                    <a:pt x="5729802" y="3116612"/>
-                  </a:lnTo>
-                  <a:lnTo>
-                    <a:pt x="5801424" y="3125759"/>
-                  </a:lnTo>
-                  <a:lnTo>
-                    <a:pt x="5873047" y="3134679"/>
-                  </a:lnTo>
-                  <a:lnTo>
-                    <a:pt x="5944669" y="3143376"/>
-                  </a:lnTo>
-                  <a:lnTo>
-                    <a:pt x="6016292" y="3151856"/>
-                  </a:lnTo>
-                  <a:lnTo>
-                    <a:pt x="6087914" y="3160125"/>
-                  </a:lnTo>
-                  <a:lnTo>
-                    <a:pt x="6159537" y="3168188"/>
-                  </a:lnTo>
-                  <a:lnTo>
-                    <a:pt x="6231159" y="3176050"/>
-                  </a:lnTo>
-                  <a:lnTo>
-                    <a:pt x="6302782" y="3183716"/>
-                  </a:lnTo>
-                  <a:lnTo>
-                    <a:pt x="6374404" y="3191192"/>
-                  </a:lnTo>
-                  <a:lnTo>
-                    <a:pt x="6446027" y="3198481"/>
-                  </a:lnTo>
-                  <a:lnTo>
-                    <a:pt x="6517649" y="3205588"/>
-                  </a:lnTo>
-                  <a:lnTo>
-                    <a:pt x="6589272" y="3212518"/>
-                  </a:lnTo>
-                  <a:lnTo>
-                    <a:pt x="6660894" y="3219276"/>
-                  </a:lnTo>
-                  <a:lnTo>
-                    <a:pt x="6732517" y="3225865"/>
-                  </a:lnTo>
-                  <a:lnTo>
-                    <a:pt x="6804139" y="3232290"/>
-                  </a:lnTo>
-                  <a:lnTo>
-                    <a:pt x="6875762" y="3238555"/>
-                  </a:lnTo>
-                  <a:lnTo>
-                    <a:pt x="6947385" y="3244664"/>
-                  </a:lnTo>
-                  <a:lnTo>
-                    <a:pt x="7019007" y="3250621"/>
-                  </a:lnTo>
-                  <a:lnTo>
-                    <a:pt x="7090630" y="3256429"/>
-                  </a:lnTo>
-                  <a:lnTo>
-                    <a:pt x="7090630" y="3450954"/>
-                  </a:lnTo>
-                  <a:lnTo>
-                    <a:pt x="7019007" y="3448823"/>
-                  </a:lnTo>
-                  <a:lnTo>
-                    <a:pt x="6947385" y="3446553"/>
-                  </a:lnTo>
-                  <a:lnTo>
-                    <a:pt x="6875762" y="3444135"/>
-                  </a:lnTo>
-                  <a:lnTo>
-                    <a:pt x="6804139" y="3441561"/>
-                  </a:lnTo>
-                  <a:lnTo>
-                    <a:pt x="6732517" y="3438819"/>
-                  </a:lnTo>
-                  <a:lnTo>
-                    <a:pt x="6660894" y="3435899"/>
-                  </a:lnTo>
-                  <a:lnTo>
-                    <a:pt x="6589272" y="3432789"/>
-                  </a:lnTo>
-                  <a:lnTo>
-                    <a:pt x="6517649" y="3429477"/>
-                  </a:lnTo>
-                  <a:lnTo>
-                    <a:pt x="6446027" y="3425950"/>
-                  </a:lnTo>
-                  <a:lnTo>
-                    <a:pt x="6374404" y="3422194"/>
-                  </a:lnTo>
-                  <a:lnTo>
-                    <a:pt x="6302782" y="3418193"/>
-                  </a:lnTo>
-                  <a:lnTo>
-                    <a:pt x="6231159" y="3413933"/>
-                  </a:lnTo>
-                  <a:lnTo>
-                    <a:pt x="6159537" y="3409395"/>
-                  </a:lnTo>
-                  <a:lnTo>
-                    <a:pt x="6087914" y="3404563"/>
-                  </a:lnTo>
-                  <a:lnTo>
-                    <a:pt x="6016292" y="3399416"/>
-                  </a:lnTo>
-                  <a:lnTo>
-                    <a:pt x="5944669" y="3393935"/>
-                  </a:lnTo>
-                  <a:lnTo>
-                    <a:pt x="5873047" y="3388098"/>
-                  </a:lnTo>
-                  <a:lnTo>
-                    <a:pt x="5801424" y="3381882"/>
-                  </a:lnTo>
-                  <a:lnTo>
-                    <a:pt x="5729802" y="3375261"/>
-                  </a:lnTo>
-                  <a:lnTo>
-                    <a:pt x="5658179" y="3368210"/>
-                  </a:lnTo>
-                  <a:lnTo>
-                    <a:pt x="5586557" y="3360701"/>
-                  </a:lnTo>
-                  <a:lnTo>
-                    <a:pt x="5514934" y="3352704"/>
-                  </a:lnTo>
-                  <a:lnTo>
-                    <a:pt x="5443311" y="3344187"/>
-                  </a:lnTo>
-                  <a:lnTo>
-                    <a:pt x="5371689" y="3335116"/>
-                  </a:lnTo>
-                  <a:lnTo>
-                    <a:pt x="5300066" y="3325456"/>
-                  </a:lnTo>
-                  <a:lnTo>
-                    <a:pt x="5228444" y="3315168"/>
-                  </a:lnTo>
-                  <a:lnTo>
-                    <a:pt x="5156821" y="3304212"/>
-                  </a:lnTo>
-                  <a:lnTo>
-                    <a:pt x="5085199" y="3292543"/>
-                  </a:lnTo>
-                  <a:lnTo>
-                    <a:pt x="5013576" y="3280116"/>
-                  </a:lnTo>
-                  <a:lnTo>
-                    <a:pt x="4941954" y="3266881"/>
-                  </a:lnTo>
-                  <a:lnTo>
-                    <a:pt x="4870331" y="3252786"/>
-                  </a:lnTo>
-                  <a:lnTo>
-                    <a:pt x="4798709" y="3237775"/>
-                  </a:lnTo>
-                  <a:lnTo>
-                    <a:pt x="4727086" y="3221788"/>
-                  </a:lnTo>
-                  <a:lnTo>
-                    <a:pt x="4655464" y="3204762"/>
-                  </a:lnTo>
-                  <a:lnTo>
-                    <a:pt x="4583841" y="3186630"/>
-                  </a:lnTo>
-                  <a:lnTo>
-                    <a:pt x="4512219" y="3167319"/>
-                  </a:lnTo>
-                  <a:lnTo>
-                    <a:pt x="4440596" y="3146753"/>
-                  </a:lnTo>
-                  <a:lnTo>
-                    <a:pt x="4368974" y="3124851"/>
-                  </a:lnTo>
-                  <a:lnTo>
-                    <a:pt x="4297351" y="3101525"/>
-                  </a:lnTo>
-                  <a:lnTo>
-                    <a:pt x="4225729" y="3076683"/>
-                  </a:lnTo>
-                  <a:lnTo>
-                    <a:pt x="4154106" y="3050226"/>
-                  </a:lnTo>
-                  <a:lnTo>
-                    <a:pt x="4082483" y="3022050"/>
-                  </a:lnTo>
-                  <a:lnTo>
-                    <a:pt x="4010861" y="2992042"/>
-                  </a:lnTo>
-                  <a:lnTo>
-                    <a:pt x="3939238" y="2960084"/>
-                  </a:lnTo>
-                  <a:lnTo>
-                    <a:pt x="3867616" y="2926049"/>
-                  </a:lnTo>
-                  <a:lnTo>
-                    <a:pt x="3795993" y="2889802"/>
-                  </a:lnTo>
-                  <a:lnTo>
-                    <a:pt x="3724371" y="2851199"/>
-                  </a:lnTo>
-                  <a:lnTo>
-                    <a:pt x="3652748" y="2810088"/>
-                  </a:lnTo>
-                  <a:lnTo>
-                    <a:pt x="3581126" y="2766304"/>
-                  </a:lnTo>
-                  <a:lnTo>
-                    <a:pt x="3509503" y="2719674"/>
-                  </a:lnTo>
-                  <a:lnTo>
-                    <a:pt x="3437881" y="2670014"/>
-                  </a:lnTo>
-                  <a:lnTo>
-                    <a:pt x="3366258" y="2639590"/>
-                  </a:lnTo>
-                  <a:lnTo>
-                    <a:pt x="3294636" y="2618021"/>
-                  </a:lnTo>
-                  <a:lnTo>
-                    <a:pt x="3223013" y="2595900"/>
-                  </a:lnTo>
-                  <a:lnTo>
-                    <a:pt x="3151391" y="2573214"/>
-                  </a:lnTo>
-                  <a:lnTo>
-                    <a:pt x="3079768" y="2549948"/>
-                  </a:lnTo>
-                  <a:lnTo>
-                    <a:pt x="3008146" y="2526088"/>
-                  </a:lnTo>
-                  <a:lnTo>
-                    <a:pt x="2936523" y="2501619"/>
-                  </a:lnTo>
-                  <a:lnTo>
-                    <a:pt x="2864901" y="2476524"/>
-                  </a:lnTo>
-                  <a:lnTo>
-                    <a:pt x="2793278" y="2450788"/>
-                  </a:lnTo>
-                  <a:lnTo>
-                    <a:pt x="2721655" y="2424394"/>
-                  </a:lnTo>
-                  <a:lnTo>
-                    <a:pt x="2650033" y="2397326"/>
-                  </a:lnTo>
-                  <a:lnTo>
-                    <a:pt x="2578410" y="2369566"/>
-                  </a:lnTo>
-                  <a:lnTo>
-                    <a:pt x="2506788" y="2341097"/>
-                  </a:lnTo>
-                  <a:lnTo>
-                    <a:pt x="2435165" y="2311900"/>
-                  </a:lnTo>
-                  <a:lnTo>
-                    <a:pt x="2363543" y="2281958"/>
-                  </a:lnTo>
-                  <a:lnTo>
-                    <a:pt x="2291920" y="2251250"/>
-                  </a:lnTo>
-                  <a:lnTo>
-                    <a:pt x="2220298" y="2219758"/>
-                  </a:lnTo>
-                  <a:lnTo>
-                    <a:pt x="2148675" y="2187461"/>
-                  </a:lnTo>
-                  <a:lnTo>
-                    <a:pt x="2077053" y="2154339"/>
-                  </a:lnTo>
-                  <a:lnTo>
-                    <a:pt x="2005430" y="2120370"/>
-                  </a:lnTo>
-                  <a:lnTo>
-                    <a:pt x="1933808" y="2085534"/>
-                  </a:lnTo>
-                  <a:lnTo>
-                    <a:pt x="1862185" y="2049807"/>
-                  </a:lnTo>
-                  <a:lnTo>
-                    <a:pt x="1790563" y="2013168"/>
-                  </a:lnTo>
-                  <a:lnTo>
-                    <a:pt x="1718940" y="1975592"/>
-                  </a:lnTo>
-                  <a:lnTo>
-                    <a:pt x="1647318" y="1937057"/>
-                  </a:lnTo>
-                  <a:lnTo>
-                    <a:pt x="1575695" y="1897536"/>
-                  </a:lnTo>
-                  <a:lnTo>
-                    <a:pt x="1504073" y="1857006"/>
-                  </a:lnTo>
-                  <a:lnTo>
-                    <a:pt x="1432450" y="1815440"/>
-                  </a:lnTo>
-                  <a:lnTo>
-                    <a:pt x="1360827" y="1772812"/>
-                  </a:lnTo>
-                  <a:lnTo>
-                    <a:pt x="1289205" y="1729095"/>
-                  </a:lnTo>
-                  <a:lnTo>
-                    <a:pt x="1217582" y="1684261"/>
-                  </a:lnTo>
-                  <a:lnTo>
-                    <a:pt x="1145960" y="1638281"/>
-                  </a:lnTo>
-                  <a:lnTo>
-                    <a:pt x="1074337" y="1591127"/>
-                  </a:lnTo>
-                  <a:lnTo>
-                    <a:pt x="1002715" y="1542767"/>
-                  </a:lnTo>
-                  <a:lnTo>
-                    <a:pt x="931092" y="1493172"/>
-                  </a:lnTo>
-                  <a:lnTo>
-                    <a:pt x="859470" y="1442310"/>
-                  </a:lnTo>
-                  <a:lnTo>
-                    <a:pt x="787847" y="1390148"/>
-                  </a:lnTo>
-                  <a:lnTo>
-                    <a:pt x="716225" y="1336653"/>
-                  </a:lnTo>
-                  <a:lnTo>
-                    <a:pt x="644602" y="1281791"/>
-                  </a:lnTo>
-                  <a:lnTo>
-                    <a:pt x="572980" y="1225528"/>
-                  </a:lnTo>
-                  <a:lnTo>
-                    <a:pt x="501357" y="1167827"/>
-                  </a:lnTo>
-                  <a:lnTo>
-                    <a:pt x="429735" y="1108651"/>
-                  </a:lnTo>
-                  <a:lnTo>
-                    <a:pt x="358112" y="1047964"/>
-                  </a:lnTo>
-                  <a:lnTo>
-                    <a:pt x="286490" y="985726"/>
-                  </a:lnTo>
-                  <a:lnTo>
-                    <a:pt x="214867" y="921897"/>
-                  </a:lnTo>
-                  <a:lnTo>
-                    <a:pt x="143245" y="856438"/>
-                  </a:lnTo>
-                  <a:lnTo>
-                    <a:pt x="71622" y="789306"/>
-                  </a:lnTo>
-                  <a:lnTo>
-                    <a:pt x="0" y="720459"/>
+                    <a:pt x="1790563" y="5867"/>
+                  </a:lnTo>
+                  <a:lnTo>
+                    <a:pt x="1862185" y="218725"/>
+                  </a:lnTo>
+                  <a:lnTo>
+                    <a:pt x="1933808" y="418557"/>
+                  </a:lnTo>
+                  <a:lnTo>
+                    <a:pt x="2005430" y="606157"/>
+                  </a:lnTo>
+                  <a:lnTo>
+                    <a:pt x="2077053" y="782276"/>
+                  </a:lnTo>
+                  <a:lnTo>
+                    <a:pt x="2148675" y="947616"/>
+                  </a:lnTo>
+                  <a:lnTo>
+                    <a:pt x="2220298" y="1102836"/>
+                  </a:lnTo>
+                  <a:lnTo>
+                    <a:pt x="2291920" y="1248557"/>
+                  </a:lnTo>
+                  <a:lnTo>
+                    <a:pt x="2363543" y="1385358"/>
+                  </a:lnTo>
+                  <a:lnTo>
+                    <a:pt x="2435165" y="1513787"/>
+                  </a:lnTo>
+                  <a:lnTo>
+                    <a:pt x="2506788" y="1634356"/>
+                  </a:lnTo>
+                  <a:lnTo>
+                    <a:pt x="2578410" y="1747545"/>
+                  </a:lnTo>
+                  <a:lnTo>
+                    <a:pt x="2650033" y="1853807"/>
+                  </a:lnTo>
+                  <a:lnTo>
+                    <a:pt x="2721655" y="1953565"/>
+                  </a:lnTo>
+                  <a:lnTo>
+                    <a:pt x="2793278" y="2047218"/>
+                  </a:lnTo>
+                  <a:lnTo>
+                    <a:pt x="2864901" y="2135139"/>
+                  </a:lnTo>
+                  <a:lnTo>
+                    <a:pt x="2936523" y="2217679"/>
+                  </a:lnTo>
+                  <a:lnTo>
+                    <a:pt x="3008146" y="2295166"/>
+                  </a:lnTo>
+                  <a:lnTo>
+                    <a:pt x="3079768" y="2367912"/>
+                  </a:lnTo>
+                  <a:lnTo>
+                    <a:pt x="3151391" y="2436205"/>
+                  </a:lnTo>
+                  <a:lnTo>
+                    <a:pt x="3223013" y="2500318"/>
+                  </a:lnTo>
+                  <a:lnTo>
+                    <a:pt x="3294636" y="2560508"/>
+                  </a:lnTo>
+                  <a:lnTo>
+                    <a:pt x="3366258" y="2617013"/>
+                  </a:lnTo>
+                  <a:lnTo>
+                    <a:pt x="3437881" y="2660655"/>
+                  </a:lnTo>
+                  <a:lnTo>
+                    <a:pt x="3509503" y="2681269"/>
+                  </a:lnTo>
+                  <a:lnTo>
+                    <a:pt x="3581126" y="2701366"/>
+                  </a:lnTo>
+                  <a:lnTo>
+                    <a:pt x="3652748" y="2720960"/>
+                  </a:lnTo>
+                  <a:lnTo>
+                    <a:pt x="3724371" y="2740063"/>
+                  </a:lnTo>
+                  <a:lnTo>
+                    <a:pt x="3795993" y="2758688"/>
+                  </a:lnTo>
+                  <a:lnTo>
+                    <a:pt x="3867616" y="2776846"/>
+                  </a:lnTo>
+                  <a:lnTo>
+                    <a:pt x="3939238" y="2794550"/>
+                  </a:lnTo>
+                  <a:lnTo>
+                    <a:pt x="4010861" y="2811810"/>
+                  </a:lnTo>
+                  <a:lnTo>
+                    <a:pt x="4082483" y="2828638"/>
+                  </a:lnTo>
+                  <a:lnTo>
+                    <a:pt x="4154106" y="2845044"/>
+                  </a:lnTo>
+                  <a:lnTo>
+                    <a:pt x="4225729" y="2861040"/>
+                  </a:lnTo>
+                  <a:lnTo>
+                    <a:pt x="4297351" y="2876635"/>
+                  </a:lnTo>
+                  <a:lnTo>
+                    <a:pt x="4368974" y="2891839"/>
+                  </a:lnTo>
+                  <a:lnTo>
+                    <a:pt x="4440596" y="2906663"/>
+                  </a:lnTo>
+                  <a:lnTo>
+                    <a:pt x="4512219" y="2921115"/>
+                  </a:lnTo>
+                  <a:lnTo>
+                    <a:pt x="4583841" y="2935206"/>
+                  </a:lnTo>
+                  <a:lnTo>
+                    <a:pt x="4655464" y="2948943"/>
+                  </a:lnTo>
+                  <a:lnTo>
+                    <a:pt x="4727086" y="2962337"/>
+                  </a:lnTo>
+                  <a:lnTo>
+                    <a:pt x="4798709" y="2975395"/>
+                  </a:lnTo>
+                  <a:lnTo>
+                    <a:pt x="4870331" y="2988126"/>
+                  </a:lnTo>
+                  <a:lnTo>
+                    <a:pt x="4941954" y="3000538"/>
+                  </a:lnTo>
+                  <a:lnTo>
+                    <a:pt x="5013576" y="3012640"/>
+                  </a:lnTo>
+                  <a:lnTo>
+                    <a:pt x="5085199" y="3024438"/>
+                  </a:lnTo>
+                  <a:lnTo>
+                    <a:pt x="5156821" y="3035941"/>
+                  </a:lnTo>
+                  <a:lnTo>
+                    <a:pt x="5228444" y="3047156"/>
+                  </a:lnTo>
+                  <a:lnTo>
+                    <a:pt x="5300066" y="3058090"/>
+                  </a:lnTo>
+                  <a:lnTo>
+                    <a:pt x="5371689" y="3068750"/>
+                  </a:lnTo>
+                  <a:lnTo>
+                    <a:pt x="5443311" y="3079143"/>
+                  </a:lnTo>
+                  <a:lnTo>
+                    <a:pt x="5514934" y="3089276"/>
+                  </a:lnTo>
+                  <a:lnTo>
+                    <a:pt x="5586557" y="3099155"/>
+                  </a:lnTo>
+                  <a:lnTo>
+                    <a:pt x="5658179" y="3108787"/>
+                  </a:lnTo>
+                  <a:lnTo>
+                    <a:pt x="5729802" y="3118177"/>
+                  </a:lnTo>
+                  <a:lnTo>
+                    <a:pt x="5801424" y="3127332"/>
+                  </a:lnTo>
+                  <a:lnTo>
+                    <a:pt x="5873047" y="3136258"/>
+                  </a:lnTo>
+                  <a:lnTo>
+                    <a:pt x="5944669" y="3144961"/>
+                  </a:lnTo>
+                  <a:lnTo>
+                    <a:pt x="6016292" y="3153445"/>
+                  </a:lnTo>
+                  <a:lnTo>
+                    <a:pt x="6087914" y="3161717"/>
+                  </a:lnTo>
+                  <a:lnTo>
+                    <a:pt x="6159537" y="3169782"/>
+                  </a:lnTo>
+                  <a:lnTo>
+                    <a:pt x="6231159" y="3177645"/>
+                  </a:lnTo>
+                  <a:lnTo>
+                    <a:pt x="6302782" y="3185311"/>
+                  </a:lnTo>
+                  <a:lnTo>
+                    <a:pt x="6374404" y="3192785"/>
+                  </a:lnTo>
+                  <a:lnTo>
+                    <a:pt x="6446027" y="3200072"/>
+                  </a:lnTo>
+                  <a:lnTo>
+                    <a:pt x="6517649" y="3207176"/>
+                  </a:lnTo>
+                  <a:lnTo>
+                    <a:pt x="6589272" y="3214103"/>
+                  </a:lnTo>
+                  <a:lnTo>
+                    <a:pt x="6660894" y="3220856"/>
+                  </a:lnTo>
+                  <a:lnTo>
+                    <a:pt x="6732517" y="3227439"/>
+                  </a:lnTo>
+                  <a:lnTo>
+                    <a:pt x="6804139" y="3233858"/>
+                  </a:lnTo>
+                  <a:lnTo>
+                    <a:pt x="6875762" y="3240116"/>
+                  </a:lnTo>
+                  <a:lnTo>
+                    <a:pt x="6947385" y="3246218"/>
+                  </a:lnTo>
+                  <a:lnTo>
+                    <a:pt x="7019007" y="3252167"/>
+                  </a:lnTo>
+                  <a:lnTo>
+                    <a:pt x="7090630" y="3257966"/>
+                  </a:lnTo>
+                  <a:lnTo>
+                    <a:pt x="7090630" y="3451268"/>
+                  </a:lnTo>
+                  <a:lnTo>
+                    <a:pt x="7019007" y="3449150"/>
+                  </a:lnTo>
+                  <a:lnTo>
+                    <a:pt x="6947385" y="3446895"/>
+                  </a:lnTo>
+                  <a:lnTo>
+                    <a:pt x="6875762" y="3444492"/>
+                  </a:lnTo>
+                  <a:lnTo>
+                    <a:pt x="6804139" y="3441933"/>
+                  </a:lnTo>
+                  <a:lnTo>
+                    <a:pt x="6732517" y="3439207"/>
+                  </a:lnTo>
+                  <a:lnTo>
+                    <a:pt x="6660894" y="3436304"/>
+                  </a:lnTo>
+                  <a:lnTo>
+                    <a:pt x="6589272" y="3433211"/>
+                  </a:lnTo>
+                  <a:lnTo>
+                    <a:pt x="6517649" y="3429916"/>
+                  </a:lnTo>
+                  <a:lnTo>
+                    <a:pt x="6446027" y="3426407"/>
+                  </a:lnTo>
+                  <a:lnTo>
+                    <a:pt x="6374404" y="3422668"/>
+                  </a:lnTo>
+                  <a:lnTo>
+                    <a:pt x="6302782" y="3418687"/>
+                  </a:lnTo>
+                  <a:lnTo>
+                    <a:pt x="6231159" y="3414445"/>
+                  </a:lnTo>
+                  <a:lnTo>
+                    <a:pt x="6159537" y="3409927"/>
+                  </a:lnTo>
+                  <a:lnTo>
+                    <a:pt x="6087914" y="3405115"/>
+                  </a:lnTo>
+                  <a:lnTo>
+                    <a:pt x="6016292" y="3399988"/>
+                  </a:lnTo>
+                  <a:lnTo>
+                    <a:pt x="5944669" y="3394528"/>
+                  </a:lnTo>
+                  <a:lnTo>
+                    <a:pt x="5873047" y="3388711"/>
+                  </a:lnTo>
+                  <a:lnTo>
+                    <a:pt x="5801424" y="3382516"/>
+                  </a:lnTo>
+                  <a:lnTo>
+                    <a:pt x="5729802" y="3375916"/>
+                  </a:lnTo>
+                  <a:lnTo>
+                    <a:pt x="5658179" y="3368886"/>
+                  </a:lnTo>
+                  <a:lnTo>
+                    <a:pt x="5586557" y="3361398"/>
+                  </a:lnTo>
+                  <a:lnTo>
+                    <a:pt x="5514934" y="3353421"/>
+                  </a:lnTo>
+                  <a:lnTo>
+                    <a:pt x="5443311" y="3344925"/>
+                  </a:lnTo>
+                  <a:lnTo>
+                    <a:pt x="5371689" y="3335875"/>
+                  </a:lnTo>
+                  <a:lnTo>
+                    <a:pt x="5300066" y="3326235"/>
+                  </a:lnTo>
+                  <a:lnTo>
+                    <a:pt x="5228444" y="3315966"/>
+                  </a:lnTo>
+                  <a:lnTo>
+                    <a:pt x="5156821" y="3305028"/>
+                  </a:lnTo>
+                  <a:lnTo>
+                    <a:pt x="5085199" y="3293376"/>
+                  </a:lnTo>
+                  <a:lnTo>
+                    <a:pt x="5013576" y="3280965"/>
+                  </a:lnTo>
+                  <a:lnTo>
+                    <a:pt x="4941954" y="3267745"/>
+                  </a:lnTo>
+                  <a:lnTo>
+                    <a:pt x="4870331" y="3253663"/>
+                  </a:lnTo>
+                  <a:lnTo>
+                    <a:pt x="4798709" y="3238663"/>
+                  </a:lnTo>
+                  <a:lnTo>
+                    <a:pt x="4727086" y="3222685"/>
+                  </a:lnTo>
+                  <a:lnTo>
+                    <a:pt x="4655464" y="3205666"/>
+                  </a:lnTo>
+                  <a:lnTo>
+                    <a:pt x="4583841" y="3187537"/>
+                  </a:lnTo>
+                  <a:lnTo>
+                    <a:pt x="4512219" y="3168226"/>
+                  </a:lnTo>
+                  <a:lnTo>
+                    <a:pt x="4440596" y="3147656"/>
+                  </a:lnTo>
+                  <a:lnTo>
+                    <a:pt x="4368974" y="3125745"/>
+                  </a:lnTo>
+                  <a:lnTo>
+                    <a:pt x="4297351" y="3102405"/>
+                  </a:lnTo>
+                  <a:lnTo>
+                    <a:pt x="4225729" y="3077544"/>
+                  </a:lnTo>
+                  <a:lnTo>
+                    <a:pt x="4154106" y="3051062"/>
+                  </a:lnTo>
+                  <a:lnTo>
+                    <a:pt x="4082483" y="3022854"/>
+                  </a:lnTo>
+                  <a:lnTo>
+                    <a:pt x="4010861" y="2992807"/>
+                  </a:lnTo>
+                  <a:lnTo>
+                    <a:pt x="3939238" y="2960801"/>
+                  </a:lnTo>
+                  <a:lnTo>
+                    <a:pt x="3867616" y="2926708"/>
+                  </a:lnTo>
+                  <a:lnTo>
+                    <a:pt x="3795993" y="2890392"/>
+                  </a:lnTo>
+                  <a:lnTo>
+                    <a:pt x="3724371" y="2851710"/>
+                  </a:lnTo>
+                  <a:lnTo>
+                    <a:pt x="3652748" y="2810505"/>
+                  </a:lnTo>
+                  <a:lnTo>
+                    <a:pt x="3581126" y="2766614"/>
+                  </a:lnTo>
+                  <a:lnTo>
+                    <a:pt x="3509503" y="2719861"/>
+                  </a:lnTo>
+                  <a:lnTo>
+                    <a:pt x="3437881" y="2670060"/>
+                  </a:lnTo>
+                  <a:lnTo>
+                    <a:pt x="3366258" y="2639512"/>
+                  </a:lnTo>
+                  <a:lnTo>
+                    <a:pt x="3294636" y="2617826"/>
+                  </a:lnTo>
+                  <a:lnTo>
+                    <a:pt x="3223013" y="2595583"/>
+                  </a:lnTo>
+                  <a:lnTo>
+                    <a:pt x="3151391" y="2572769"/>
+                  </a:lnTo>
+                  <a:lnTo>
+                    <a:pt x="3079768" y="2549368"/>
+                  </a:lnTo>
+                  <a:lnTo>
+                    <a:pt x="3008146" y="2525367"/>
+                  </a:lnTo>
+                  <a:lnTo>
+                    <a:pt x="2936523" y="2500749"/>
+                  </a:lnTo>
+                  <a:lnTo>
+                    <a:pt x="2864901" y="2475498"/>
+                  </a:lnTo>
+                  <a:lnTo>
+                    <a:pt x="2793278" y="2449599"/>
+                  </a:lnTo>
+                  <a:lnTo>
+                    <a:pt x="2721655" y="2423035"/>
+                  </a:lnTo>
+                  <a:lnTo>
+                    <a:pt x="2650033" y="2395788"/>
+                  </a:lnTo>
+                  <a:lnTo>
+                    <a:pt x="2578410" y="2367842"/>
+                  </a:lnTo>
+                  <a:lnTo>
+                    <a:pt x="2506788" y="2339177"/>
+                  </a:lnTo>
+                  <a:lnTo>
+                    <a:pt x="2435165" y="2309776"/>
+                  </a:lnTo>
+                  <a:lnTo>
+                    <a:pt x="2363543" y="2279620"/>
+                  </a:lnTo>
+                  <a:lnTo>
+                    <a:pt x="2291920" y="2248690"/>
+                  </a:lnTo>
+                  <a:lnTo>
+                    <a:pt x="2220298" y="2216964"/>
+                  </a:lnTo>
+                  <a:lnTo>
+                    <a:pt x="2148675" y="2184424"/>
+                  </a:lnTo>
+                  <a:lnTo>
+                    <a:pt x="2077053" y="2151048"/>
+                  </a:lnTo>
+                  <a:lnTo>
+                    <a:pt x="2005430" y="2116815"/>
+                  </a:lnTo>
+                  <a:lnTo>
+                    <a:pt x="1933808" y="2081702"/>
+                  </a:lnTo>
+                  <a:lnTo>
+                    <a:pt x="1862185" y="2045688"/>
+                  </a:lnTo>
+                  <a:lnTo>
+                    <a:pt x="1790563" y="2008748"/>
+                  </a:lnTo>
+                  <a:lnTo>
+                    <a:pt x="1718940" y="1970860"/>
+                  </a:lnTo>
+                  <a:lnTo>
+                    <a:pt x="1647318" y="1931998"/>
+                  </a:lnTo>
+                  <a:lnTo>
+                    <a:pt x="1575695" y="1892138"/>
+                  </a:lnTo>
+                  <a:lnTo>
+                    <a:pt x="1504073" y="1851254"/>
+                  </a:lnTo>
+                  <a:lnTo>
+                    <a:pt x="1432450" y="1809319"/>
+                  </a:lnTo>
+                  <a:lnTo>
+                    <a:pt x="1360827" y="1766308"/>
+                  </a:lnTo>
+                  <a:lnTo>
+                    <a:pt x="1289205" y="1722192"/>
+                  </a:lnTo>
+                  <a:lnTo>
+                    <a:pt x="1217582" y="1676942"/>
+                  </a:lnTo>
+                  <a:lnTo>
+                    <a:pt x="1145960" y="1630531"/>
+                  </a:lnTo>
+                  <a:lnTo>
+                    <a:pt x="1074337" y="1582927"/>
+                  </a:lnTo>
+                  <a:lnTo>
+                    <a:pt x="1002715" y="1534100"/>
+                  </a:lnTo>
+                  <a:lnTo>
+                    <a:pt x="931092" y="1484019"/>
+                  </a:lnTo>
+                  <a:lnTo>
+                    <a:pt x="859470" y="1432652"/>
+                  </a:lnTo>
+                  <a:lnTo>
+                    <a:pt x="787847" y="1379965"/>
+                  </a:lnTo>
+                  <a:lnTo>
+                    <a:pt x="716225" y="1325924"/>
+                  </a:lnTo>
+                  <a:lnTo>
+                    <a:pt x="644602" y="1270496"/>
+                  </a:lnTo>
+                  <a:lnTo>
+                    <a:pt x="572980" y="1213644"/>
+                  </a:lnTo>
+                  <a:lnTo>
+                    <a:pt x="501357" y="1155331"/>
+                  </a:lnTo>
+                  <a:lnTo>
+                    <a:pt x="429735" y="1095521"/>
+                  </a:lnTo>
+                  <a:lnTo>
+                    <a:pt x="358112" y="1034174"/>
+                  </a:lnTo>
+                  <a:lnTo>
+                    <a:pt x="286490" y="971251"/>
+                  </a:lnTo>
+                  <a:lnTo>
+                    <a:pt x="214867" y="906712"/>
+                  </a:lnTo>
+                  <a:lnTo>
+                    <a:pt x="143245" y="840515"/>
+                  </a:lnTo>
+                  <a:lnTo>
+                    <a:pt x="71622" y="772618"/>
+                  </a:lnTo>
+                  <a:lnTo>
+                    <a:pt x="0" y="702977"/>
                   </a:lnTo>
                   <a:close/>
                 </a:path>
@@ -3518,240 +3518,240 @@
           </p:nvSpPr>
           <p:spPr>
             <a:xfrm>
-              <a:off x="2956047" y="2073503"/>
-              <a:ext cx="5306631" cy="3256429"/>
+              <a:off x="2960759" y="2073503"/>
+              <a:ext cx="5301920" cy="3257966"/>
             </a:xfrm>
             <a:custGeom>
               <a:avLst/>
               <a:pathLst>
-                <a:path w="5306631" h="3256429">
+                <a:path w="5301920" h="3257966">
                   <a:moveTo>
                     <a:pt x="0" y="0"/>
                   </a:moveTo>
                   <a:lnTo>
-                    <a:pt x="6564" y="20630"/>
-                  </a:lnTo>
-                  <a:lnTo>
-                    <a:pt x="78187" y="231976"/>
-                  </a:lnTo>
-                  <a:lnTo>
-                    <a:pt x="149809" y="430424"/>
-                  </a:lnTo>
-                  <a:lnTo>
-                    <a:pt x="221432" y="616761"/>
-                  </a:lnTo>
-                  <a:lnTo>
-                    <a:pt x="293054" y="791726"/>
-                  </a:lnTo>
-                  <a:lnTo>
-                    <a:pt x="364677" y="956014"/>
-                  </a:lnTo>
-                  <a:lnTo>
-                    <a:pt x="436299" y="1110275"/>
-                  </a:lnTo>
-                  <a:lnTo>
-                    <a:pt x="507922" y="1255123"/>
-                  </a:lnTo>
-                  <a:lnTo>
-                    <a:pt x="579544" y="1391131"/>
-                  </a:lnTo>
-                  <a:lnTo>
-                    <a:pt x="651167" y="1518838"/>
-                  </a:lnTo>
-                  <a:lnTo>
-                    <a:pt x="722789" y="1638752"/>
-                  </a:lnTo>
-                  <a:lnTo>
-                    <a:pt x="794412" y="1751347"/>
-                  </a:lnTo>
-                  <a:lnTo>
-                    <a:pt x="866035" y="1857072"/>
-                  </a:lnTo>
-                  <a:lnTo>
-                    <a:pt x="937657" y="1956344"/>
-                  </a:lnTo>
-                  <a:lnTo>
-                    <a:pt x="1009280" y="2049558"/>
-                  </a:lnTo>
-                  <a:lnTo>
-                    <a:pt x="1080902" y="2137083"/>
-                  </a:lnTo>
-                  <a:lnTo>
-                    <a:pt x="1152525" y="2219266"/>
-                  </a:lnTo>
-                  <a:lnTo>
-                    <a:pt x="1224147" y="2296435"/>
-                  </a:lnTo>
-                  <a:lnTo>
-                    <a:pt x="1295770" y="2368894"/>
-                  </a:lnTo>
-                  <a:lnTo>
-                    <a:pt x="1367392" y="2436930"/>
-                  </a:lnTo>
-                  <a:lnTo>
-                    <a:pt x="1439015" y="2500815"/>
-                  </a:lnTo>
-                  <a:lnTo>
-                    <a:pt x="1510637" y="2560801"/>
-                  </a:lnTo>
-                  <a:lnTo>
-                    <a:pt x="1582260" y="2617126"/>
-                  </a:lnTo>
-                  <a:lnTo>
-                    <a:pt x="1653882" y="2660622"/>
-                  </a:lnTo>
-                  <a:lnTo>
-                    <a:pt x="1725505" y="2681130"/>
-                  </a:lnTo>
-                  <a:lnTo>
-                    <a:pt x="1797127" y="2701128"/>
-                  </a:lnTo>
-                  <a:lnTo>
-                    <a:pt x="1868750" y="2720626"/>
-                  </a:lnTo>
-                  <a:lnTo>
-                    <a:pt x="1940372" y="2739640"/>
-                  </a:lnTo>
-                  <a:lnTo>
-                    <a:pt x="2011995" y="2758179"/>
-                  </a:lnTo>
-                  <a:lnTo>
-                    <a:pt x="2083617" y="2776257"/>
-                  </a:lnTo>
-                  <a:lnTo>
-                    <a:pt x="2155240" y="2793884"/>
-                  </a:lnTo>
-                  <a:lnTo>
-                    <a:pt x="2226863" y="2811072"/>
-                  </a:lnTo>
-                  <a:lnTo>
-                    <a:pt x="2298485" y="2827831"/>
-                  </a:lnTo>
-                  <a:lnTo>
-                    <a:pt x="2370108" y="2844173"/>
-                  </a:lnTo>
-                  <a:lnTo>
-                    <a:pt x="2441730" y="2860108"/>
-                  </a:lnTo>
-                  <a:lnTo>
-                    <a:pt x="2513353" y="2875646"/>
-                  </a:lnTo>
-                  <a:lnTo>
-                    <a:pt x="2584975" y="2890797"/>
-                  </a:lnTo>
-                  <a:lnTo>
-                    <a:pt x="2656598" y="2905570"/>
-                  </a:lnTo>
-                  <a:lnTo>
-                    <a:pt x="2728220" y="2919976"/>
-                  </a:lnTo>
-                  <a:lnTo>
-                    <a:pt x="2799843" y="2934022"/>
-                  </a:lnTo>
-                  <a:lnTo>
-                    <a:pt x="2871465" y="2947718"/>
-                  </a:lnTo>
-                  <a:lnTo>
-                    <a:pt x="2943088" y="2961073"/>
-                  </a:lnTo>
-                  <a:lnTo>
-                    <a:pt x="3014710" y="2974096"/>
-                  </a:lnTo>
-                  <a:lnTo>
-                    <a:pt x="3086333" y="2986794"/>
-                  </a:lnTo>
-                  <a:lnTo>
-                    <a:pt x="3157955" y="2999175"/>
-                  </a:lnTo>
-                  <a:lnTo>
-                    <a:pt x="3229578" y="3011248"/>
-                  </a:lnTo>
-                  <a:lnTo>
-                    <a:pt x="3301200" y="3023021"/>
-                  </a:lnTo>
-                  <a:lnTo>
-                    <a:pt x="3372823" y="3034500"/>
-                  </a:lnTo>
-                  <a:lnTo>
-                    <a:pt x="3444445" y="3045693"/>
-                  </a:lnTo>
-                  <a:lnTo>
-                    <a:pt x="3516068" y="3056607"/>
-                  </a:lnTo>
-                  <a:lnTo>
-                    <a:pt x="3587691" y="3067249"/>
-                  </a:lnTo>
-                  <a:lnTo>
-                    <a:pt x="3659313" y="3077626"/>
-                  </a:lnTo>
-                  <a:lnTo>
-                    <a:pt x="3730936" y="3087744"/>
-                  </a:lnTo>
-                  <a:lnTo>
-                    <a:pt x="3802558" y="3097611"/>
-                  </a:lnTo>
-                  <a:lnTo>
-                    <a:pt x="3874181" y="3107231"/>
-                  </a:lnTo>
-                  <a:lnTo>
-                    <a:pt x="3945803" y="3116612"/>
-                  </a:lnTo>
-                  <a:lnTo>
-                    <a:pt x="4017426" y="3125759"/>
-                  </a:lnTo>
-                  <a:lnTo>
-                    <a:pt x="4089048" y="3134679"/>
-                  </a:lnTo>
-                  <a:lnTo>
-                    <a:pt x="4160671" y="3143376"/>
-                  </a:lnTo>
-                  <a:lnTo>
-                    <a:pt x="4232293" y="3151856"/>
-                  </a:lnTo>
-                  <a:lnTo>
-                    <a:pt x="4303916" y="3160125"/>
-                  </a:lnTo>
-                  <a:lnTo>
-                    <a:pt x="4375538" y="3168188"/>
-                  </a:lnTo>
-                  <a:lnTo>
-                    <a:pt x="4447161" y="3176050"/>
-                  </a:lnTo>
-                  <a:lnTo>
-                    <a:pt x="4518783" y="3183716"/>
-                  </a:lnTo>
-                  <a:lnTo>
-                    <a:pt x="4590406" y="3191192"/>
-                  </a:lnTo>
-                  <a:lnTo>
-                    <a:pt x="4662028" y="3198481"/>
-                  </a:lnTo>
-                  <a:lnTo>
-                    <a:pt x="4733651" y="3205588"/>
-                  </a:lnTo>
-                  <a:lnTo>
-                    <a:pt x="4805273" y="3212518"/>
-                  </a:lnTo>
-                  <a:lnTo>
-                    <a:pt x="4876896" y="3219276"/>
-                  </a:lnTo>
-                  <a:lnTo>
-                    <a:pt x="4948519" y="3225865"/>
-                  </a:lnTo>
-                  <a:lnTo>
-                    <a:pt x="5020141" y="3232290"/>
-                  </a:lnTo>
-                  <a:lnTo>
-                    <a:pt x="5091764" y="3238555"/>
-                  </a:lnTo>
-                  <a:lnTo>
-                    <a:pt x="5163386" y="3244664"/>
-                  </a:lnTo>
-                  <a:lnTo>
-                    <a:pt x="5235009" y="3250621"/>
-                  </a:lnTo>
-                  <a:lnTo>
-                    <a:pt x="5306631" y="3256429"/>
+                    <a:pt x="1853" y="5867"/>
+                  </a:lnTo>
+                  <a:lnTo>
+                    <a:pt x="73475" y="218725"/>
+                  </a:lnTo>
+                  <a:lnTo>
+                    <a:pt x="145098" y="418557"/>
+                  </a:lnTo>
+                  <a:lnTo>
+                    <a:pt x="216720" y="606157"/>
+                  </a:lnTo>
+                  <a:lnTo>
+                    <a:pt x="288343" y="782276"/>
+                  </a:lnTo>
+                  <a:lnTo>
+                    <a:pt x="359965" y="947616"/>
+                  </a:lnTo>
+                  <a:lnTo>
+                    <a:pt x="431588" y="1102836"/>
+                  </a:lnTo>
+                  <a:lnTo>
+                    <a:pt x="503211" y="1248557"/>
+                  </a:lnTo>
+                  <a:lnTo>
+                    <a:pt x="574833" y="1385358"/>
+                  </a:lnTo>
+                  <a:lnTo>
+                    <a:pt x="646456" y="1513787"/>
+                  </a:lnTo>
+                  <a:lnTo>
+                    <a:pt x="718078" y="1634356"/>
+                  </a:lnTo>
+                  <a:lnTo>
+                    <a:pt x="789701" y="1747545"/>
+                  </a:lnTo>
+                  <a:lnTo>
+                    <a:pt x="861323" y="1853807"/>
+                  </a:lnTo>
+                  <a:lnTo>
+                    <a:pt x="932946" y="1953565"/>
+                  </a:lnTo>
+                  <a:lnTo>
+                    <a:pt x="1004568" y="2047218"/>
+                  </a:lnTo>
+                  <a:lnTo>
+                    <a:pt x="1076191" y="2135139"/>
+                  </a:lnTo>
+                  <a:lnTo>
+                    <a:pt x="1147813" y="2217679"/>
+                  </a:lnTo>
+                  <a:lnTo>
+                    <a:pt x="1219436" y="2295166"/>
+                  </a:lnTo>
+                  <a:lnTo>
+                    <a:pt x="1291058" y="2367912"/>
+                  </a:lnTo>
+                  <a:lnTo>
+                    <a:pt x="1362681" y="2436205"/>
+                  </a:lnTo>
+                  <a:lnTo>
+                    <a:pt x="1434303" y="2500318"/>
+                  </a:lnTo>
+                  <a:lnTo>
+                    <a:pt x="1505926" y="2560508"/>
+                  </a:lnTo>
+                  <a:lnTo>
+                    <a:pt x="1577548" y="2617013"/>
+                  </a:lnTo>
+                  <a:lnTo>
+                    <a:pt x="1649171" y="2660655"/>
+                  </a:lnTo>
+                  <a:lnTo>
+                    <a:pt x="1720793" y="2681269"/>
+                  </a:lnTo>
+                  <a:lnTo>
+                    <a:pt x="1792416" y="2701366"/>
+                  </a:lnTo>
+                  <a:lnTo>
+                    <a:pt x="1864039" y="2720960"/>
+                  </a:lnTo>
+                  <a:lnTo>
+                    <a:pt x="1935661" y="2740063"/>
+                  </a:lnTo>
+                  <a:lnTo>
+                    <a:pt x="2007284" y="2758688"/>
+                  </a:lnTo>
+                  <a:lnTo>
+                    <a:pt x="2078906" y="2776846"/>
+                  </a:lnTo>
+                  <a:lnTo>
+                    <a:pt x="2150529" y="2794550"/>
+                  </a:lnTo>
+                  <a:lnTo>
+                    <a:pt x="2222151" y="2811810"/>
+                  </a:lnTo>
+                  <a:lnTo>
+                    <a:pt x="2293774" y="2828638"/>
+                  </a:lnTo>
+                  <a:lnTo>
+                    <a:pt x="2365396" y="2845044"/>
+                  </a:lnTo>
+                  <a:lnTo>
+                    <a:pt x="2437019" y="2861040"/>
+                  </a:lnTo>
+                  <a:lnTo>
+                    <a:pt x="2508641" y="2876635"/>
+                  </a:lnTo>
+                  <a:lnTo>
+                    <a:pt x="2580264" y="2891839"/>
+                  </a:lnTo>
+                  <a:lnTo>
+                    <a:pt x="2651886" y="2906663"/>
+                  </a:lnTo>
+                  <a:lnTo>
+                    <a:pt x="2723509" y="2921115"/>
+                  </a:lnTo>
+                  <a:lnTo>
+                    <a:pt x="2795131" y="2935206"/>
+                  </a:lnTo>
+                  <a:lnTo>
+                    <a:pt x="2866754" y="2948943"/>
+                  </a:lnTo>
+                  <a:lnTo>
+                    <a:pt x="2938376" y="2962337"/>
+                  </a:lnTo>
+                  <a:lnTo>
+                    <a:pt x="3009999" y="2975395"/>
+                  </a:lnTo>
+                  <a:lnTo>
+                    <a:pt x="3081621" y="2988126"/>
+                  </a:lnTo>
+                  <a:lnTo>
+                    <a:pt x="3153244" y="3000538"/>
+                  </a:lnTo>
+                  <a:lnTo>
+                    <a:pt x="3224867" y="3012640"/>
+                  </a:lnTo>
+                  <a:lnTo>
+                    <a:pt x="3296489" y="3024438"/>
+                  </a:lnTo>
+                  <a:lnTo>
+                    <a:pt x="3368112" y="3035941"/>
+                  </a:lnTo>
+                  <a:lnTo>
+                    <a:pt x="3439734" y="3047156"/>
+                  </a:lnTo>
+                  <a:lnTo>
+                    <a:pt x="3511357" y="3058090"/>
+                  </a:lnTo>
+                  <a:lnTo>
+                    <a:pt x="3582979" y="3068750"/>
+                  </a:lnTo>
+                  <a:lnTo>
+                    <a:pt x="3654602" y="3079143"/>
+                  </a:lnTo>
+                  <a:lnTo>
+                    <a:pt x="3726224" y="3089276"/>
+                  </a:lnTo>
+                  <a:lnTo>
+                    <a:pt x="3797847" y="3099155"/>
+                  </a:lnTo>
+                  <a:lnTo>
+                    <a:pt x="3869469" y="3108787"/>
+                  </a:lnTo>
+                  <a:lnTo>
+                    <a:pt x="3941092" y="3118177"/>
+                  </a:lnTo>
+                  <a:lnTo>
+                    <a:pt x="4012714" y="3127332"/>
+                  </a:lnTo>
+                  <a:lnTo>
+                    <a:pt x="4084337" y="3136258"/>
+                  </a:lnTo>
+                  <a:lnTo>
+                    <a:pt x="4155959" y="3144961"/>
+                  </a:lnTo>
+                  <a:lnTo>
+                    <a:pt x="4227582" y="3153445"/>
+                  </a:lnTo>
+                  <a:lnTo>
+                    <a:pt x="4299204" y="3161717"/>
+                  </a:lnTo>
+                  <a:lnTo>
+                    <a:pt x="4370827" y="3169782"/>
+                  </a:lnTo>
+                  <a:lnTo>
+                    <a:pt x="4442449" y="3177645"/>
+                  </a:lnTo>
+                  <a:lnTo>
+                    <a:pt x="4514072" y="3185311"/>
+                  </a:lnTo>
+                  <a:lnTo>
+                    <a:pt x="4585695" y="3192785"/>
+                  </a:lnTo>
+                  <a:lnTo>
+                    <a:pt x="4657317" y="3200072"/>
+                  </a:lnTo>
+                  <a:lnTo>
+                    <a:pt x="4728940" y="3207176"/>
+                  </a:lnTo>
+                  <a:lnTo>
+                    <a:pt x="4800562" y="3214103"/>
+                  </a:lnTo>
+                  <a:lnTo>
+                    <a:pt x="4872185" y="3220856"/>
+                  </a:lnTo>
+                  <a:lnTo>
+                    <a:pt x="4943807" y="3227439"/>
+                  </a:lnTo>
+                  <a:lnTo>
+                    <a:pt x="5015430" y="3233858"/>
+                  </a:lnTo>
+                  <a:lnTo>
+                    <a:pt x="5087052" y="3240116"/>
+                  </a:lnTo>
+                  <a:lnTo>
+                    <a:pt x="5158675" y="3246218"/>
+                  </a:lnTo>
+                  <a:lnTo>
+                    <a:pt x="5230297" y="3252167"/>
+                  </a:lnTo>
+                  <a:lnTo>
+                    <a:pt x="5301920" y="3257966"/>
                   </a:lnTo>
                 </a:path>
               </a:pathLst>
@@ -3771,309 +3771,309 @@
           </p:nvSpPr>
           <p:spPr>
             <a:xfrm>
-              <a:off x="1172049" y="2793962"/>
-              <a:ext cx="7090630" cy="2730495"/>
+              <a:off x="1172049" y="2776480"/>
+              <a:ext cx="7090630" cy="2748291"/>
             </a:xfrm>
             <a:custGeom>
               <a:avLst/>
               <a:pathLst>
-                <a:path w="7090630" h="2730495">
+                <a:path w="7090630" h="2748291">
                   <a:moveTo>
-                    <a:pt x="7090630" y="2730495"/>
+                    <a:pt x="7090630" y="2748291"/>
                   </a:moveTo>
                   <a:lnTo>
-                    <a:pt x="7019007" y="2728363"/>
-                  </a:lnTo>
-                  <a:lnTo>
-                    <a:pt x="6947385" y="2726094"/>
-                  </a:lnTo>
-                  <a:lnTo>
-                    <a:pt x="6875762" y="2723676"/>
-                  </a:lnTo>
-                  <a:lnTo>
-                    <a:pt x="6804139" y="2721102"/>
-                  </a:lnTo>
-                  <a:lnTo>
-                    <a:pt x="6732517" y="2718360"/>
-                  </a:lnTo>
-                  <a:lnTo>
-                    <a:pt x="6660894" y="2715440"/>
-                  </a:lnTo>
-                  <a:lnTo>
-                    <a:pt x="6589272" y="2712330"/>
-                  </a:lnTo>
-                  <a:lnTo>
-                    <a:pt x="6517649" y="2709018"/>
-                  </a:lnTo>
-                  <a:lnTo>
-                    <a:pt x="6446027" y="2705491"/>
-                  </a:lnTo>
-                  <a:lnTo>
-                    <a:pt x="6374404" y="2701735"/>
-                  </a:lnTo>
-                  <a:lnTo>
-                    <a:pt x="6302782" y="2697734"/>
-                  </a:lnTo>
-                  <a:lnTo>
-                    <a:pt x="6231159" y="2693474"/>
-                  </a:lnTo>
-                  <a:lnTo>
-                    <a:pt x="6159537" y="2688936"/>
-                  </a:lnTo>
-                  <a:lnTo>
-                    <a:pt x="6087914" y="2684104"/>
-                  </a:lnTo>
-                  <a:lnTo>
-                    <a:pt x="6016292" y="2678957"/>
-                  </a:lnTo>
-                  <a:lnTo>
-                    <a:pt x="5944669" y="2673476"/>
-                  </a:lnTo>
-                  <a:lnTo>
-                    <a:pt x="5873047" y="2667639"/>
-                  </a:lnTo>
-                  <a:lnTo>
-                    <a:pt x="5801424" y="2661422"/>
-                  </a:lnTo>
-                  <a:lnTo>
-                    <a:pt x="5729802" y="2654802"/>
-                  </a:lnTo>
-                  <a:lnTo>
-                    <a:pt x="5658179" y="2647751"/>
-                  </a:lnTo>
-                  <a:lnTo>
-                    <a:pt x="5586557" y="2640242"/>
-                  </a:lnTo>
-                  <a:lnTo>
-                    <a:pt x="5514934" y="2632245"/>
-                  </a:lnTo>
-                  <a:lnTo>
-                    <a:pt x="5443311" y="2623728"/>
-                  </a:lnTo>
-                  <a:lnTo>
-                    <a:pt x="5371689" y="2614657"/>
-                  </a:lnTo>
-                  <a:lnTo>
-                    <a:pt x="5300066" y="2604997"/>
-                  </a:lnTo>
-                  <a:lnTo>
-                    <a:pt x="5228444" y="2594709"/>
-                  </a:lnTo>
-                  <a:lnTo>
-                    <a:pt x="5156821" y="2583752"/>
-                  </a:lnTo>
-                  <a:lnTo>
-                    <a:pt x="5085199" y="2572084"/>
-                  </a:lnTo>
-                  <a:lnTo>
-                    <a:pt x="5013576" y="2559657"/>
-                  </a:lnTo>
-                  <a:lnTo>
-                    <a:pt x="4941954" y="2546422"/>
-                  </a:lnTo>
-                  <a:lnTo>
-                    <a:pt x="4870331" y="2532327"/>
-                  </a:lnTo>
-                  <a:lnTo>
-                    <a:pt x="4798709" y="2517316"/>
-                  </a:lnTo>
-                  <a:lnTo>
-                    <a:pt x="4727086" y="2501329"/>
-                  </a:lnTo>
-                  <a:lnTo>
-                    <a:pt x="4655464" y="2484303"/>
-                  </a:lnTo>
-                  <a:lnTo>
-                    <a:pt x="4583841" y="2466171"/>
-                  </a:lnTo>
-                  <a:lnTo>
-                    <a:pt x="4512219" y="2446860"/>
-                  </a:lnTo>
-                  <a:lnTo>
-                    <a:pt x="4440596" y="2426294"/>
-                  </a:lnTo>
-                  <a:lnTo>
-                    <a:pt x="4368974" y="2404392"/>
-                  </a:lnTo>
-                  <a:lnTo>
-                    <a:pt x="4297351" y="2381066"/>
-                  </a:lnTo>
-                  <a:lnTo>
-                    <a:pt x="4225729" y="2356224"/>
-                  </a:lnTo>
-                  <a:lnTo>
-                    <a:pt x="4154106" y="2329767"/>
-                  </a:lnTo>
-                  <a:lnTo>
-                    <a:pt x="4082483" y="2301591"/>
-                  </a:lnTo>
-                  <a:lnTo>
-                    <a:pt x="4010861" y="2271583"/>
-                  </a:lnTo>
-                  <a:lnTo>
-                    <a:pt x="3939238" y="2239625"/>
-                  </a:lnTo>
-                  <a:lnTo>
-                    <a:pt x="3867616" y="2205590"/>
-                  </a:lnTo>
-                  <a:lnTo>
-                    <a:pt x="3795993" y="2169343"/>
-                  </a:lnTo>
-                  <a:lnTo>
-                    <a:pt x="3724371" y="2130740"/>
-                  </a:lnTo>
-                  <a:lnTo>
-                    <a:pt x="3652748" y="2089629"/>
-                  </a:lnTo>
-                  <a:lnTo>
-                    <a:pt x="3581126" y="2045845"/>
-                  </a:lnTo>
-                  <a:lnTo>
-                    <a:pt x="3509503" y="1999215"/>
-                  </a:lnTo>
-                  <a:lnTo>
-                    <a:pt x="3437881" y="1949555"/>
-                  </a:lnTo>
-                  <a:lnTo>
-                    <a:pt x="3366258" y="1919131"/>
-                  </a:lnTo>
-                  <a:lnTo>
-                    <a:pt x="3294636" y="1897561"/>
-                  </a:lnTo>
-                  <a:lnTo>
-                    <a:pt x="3223013" y="1875441"/>
-                  </a:lnTo>
-                  <a:lnTo>
-                    <a:pt x="3151391" y="1852755"/>
-                  </a:lnTo>
-                  <a:lnTo>
-                    <a:pt x="3079768" y="1829489"/>
-                  </a:lnTo>
-                  <a:lnTo>
-                    <a:pt x="3008146" y="1805629"/>
-                  </a:lnTo>
-                  <a:lnTo>
-                    <a:pt x="2936523" y="1781160"/>
-                  </a:lnTo>
-                  <a:lnTo>
-                    <a:pt x="2864901" y="1756065"/>
-                  </a:lnTo>
-                  <a:lnTo>
-                    <a:pt x="2793278" y="1730329"/>
-                  </a:lnTo>
-                  <a:lnTo>
-                    <a:pt x="2721655" y="1703935"/>
-                  </a:lnTo>
-                  <a:lnTo>
-                    <a:pt x="2650033" y="1676867"/>
-                  </a:lnTo>
-                  <a:lnTo>
-                    <a:pt x="2578410" y="1649107"/>
-                  </a:lnTo>
-                  <a:lnTo>
-                    <a:pt x="2506788" y="1620638"/>
-                  </a:lnTo>
-                  <a:lnTo>
-                    <a:pt x="2435165" y="1591441"/>
-                  </a:lnTo>
-                  <a:lnTo>
-                    <a:pt x="2363543" y="1561499"/>
-                  </a:lnTo>
-                  <a:lnTo>
-                    <a:pt x="2291920" y="1530791"/>
-                  </a:lnTo>
-                  <a:lnTo>
-                    <a:pt x="2220298" y="1499299"/>
-                  </a:lnTo>
-                  <a:lnTo>
-                    <a:pt x="2148675" y="1467002"/>
-                  </a:lnTo>
-                  <a:lnTo>
-                    <a:pt x="2077053" y="1433880"/>
-                  </a:lnTo>
-                  <a:lnTo>
-                    <a:pt x="2005430" y="1399911"/>
-                  </a:lnTo>
-                  <a:lnTo>
-                    <a:pt x="1933808" y="1365075"/>
-                  </a:lnTo>
-                  <a:lnTo>
-                    <a:pt x="1862185" y="1329348"/>
-                  </a:lnTo>
-                  <a:lnTo>
-                    <a:pt x="1790563" y="1292709"/>
-                  </a:lnTo>
-                  <a:lnTo>
-                    <a:pt x="1718940" y="1255133"/>
-                  </a:lnTo>
-                  <a:lnTo>
-                    <a:pt x="1647318" y="1216597"/>
-                  </a:lnTo>
-                  <a:lnTo>
-                    <a:pt x="1575695" y="1177077"/>
-                  </a:lnTo>
-                  <a:lnTo>
-                    <a:pt x="1504073" y="1136547"/>
-                  </a:lnTo>
-                  <a:lnTo>
-                    <a:pt x="1432450" y="1094981"/>
-                  </a:lnTo>
-                  <a:lnTo>
-                    <a:pt x="1360827" y="1052353"/>
-                  </a:lnTo>
-                  <a:lnTo>
-                    <a:pt x="1289205" y="1008636"/>
-                  </a:lnTo>
-                  <a:lnTo>
-                    <a:pt x="1217582" y="963802"/>
-                  </a:lnTo>
-                  <a:lnTo>
-                    <a:pt x="1145960" y="917822"/>
-                  </a:lnTo>
-                  <a:lnTo>
-                    <a:pt x="1074337" y="870668"/>
-                  </a:lnTo>
-                  <a:lnTo>
-                    <a:pt x="1002715" y="822308"/>
-                  </a:lnTo>
-                  <a:lnTo>
-                    <a:pt x="931092" y="772713"/>
-                  </a:lnTo>
-                  <a:lnTo>
-                    <a:pt x="859470" y="721851"/>
-                  </a:lnTo>
-                  <a:lnTo>
-                    <a:pt x="787847" y="669689"/>
-                  </a:lnTo>
-                  <a:lnTo>
-                    <a:pt x="716225" y="616194"/>
-                  </a:lnTo>
-                  <a:lnTo>
-                    <a:pt x="644602" y="561332"/>
-                  </a:lnTo>
-                  <a:lnTo>
-                    <a:pt x="572980" y="505069"/>
-                  </a:lnTo>
-                  <a:lnTo>
-                    <a:pt x="501357" y="447368"/>
-                  </a:lnTo>
-                  <a:lnTo>
-                    <a:pt x="429735" y="388192"/>
-                  </a:lnTo>
-                  <a:lnTo>
-                    <a:pt x="358112" y="327505"/>
-                  </a:lnTo>
-                  <a:lnTo>
-                    <a:pt x="286490" y="265266"/>
-                  </a:lnTo>
-                  <a:lnTo>
-                    <a:pt x="214867" y="201438"/>
-                  </a:lnTo>
-                  <a:lnTo>
-                    <a:pt x="143245" y="135979"/>
-                  </a:lnTo>
-                  <a:lnTo>
-                    <a:pt x="71622" y="68847"/>
+                    <a:pt x="7019007" y="2746173"/>
+                  </a:lnTo>
+                  <a:lnTo>
+                    <a:pt x="6947385" y="2743918"/>
+                  </a:lnTo>
+                  <a:lnTo>
+                    <a:pt x="6875762" y="2741515"/>
+                  </a:lnTo>
+                  <a:lnTo>
+                    <a:pt x="6804139" y="2738956"/>
+                  </a:lnTo>
+                  <a:lnTo>
+                    <a:pt x="6732517" y="2736230"/>
+                  </a:lnTo>
+                  <a:lnTo>
+                    <a:pt x="6660894" y="2733326"/>
+                  </a:lnTo>
+                  <a:lnTo>
+                    <a:pt x="6589272" y="2730234"/>
+                  </a:lnTo>
+                  <a:lnTo>
+                    <a:pt x="6517649" y="2726939"/>
+                  </a:lnTo>
+                  <a:lnTo>
+                    <a:pt x="6446027" y="2723430"/>
+                  </a:lnTo>
+                  <a:lnTo>
+                    <a:pt x="6374404" y="2719691"/>
+                  </a:lnTo>
+                  <a:lnTo>
+                    <a:pt x="6302782" y="2715709"/>
+                  </a:lnTo>
+                  <a:lnTo>
+                    <a:pt x="6231159" y="2711468"/>
+                  </a:lnTo>
+                  <a:lnTo>
+                    <a:pt x="6159537" y="2706950"/>
+                  </a:lnTo>
+                  <a:lnTo>
+                    <a:pt x="6087914" y="2702137"/>
+                  </a:lnTo>
+                  <a:lnTo>
+                    <a:pt x="6016292" y="2697011"/>
+                  </a:lnTo>
+                  <a:lnTo>
+                    <a:pt x="5944669" y="2691551"/>
+                  </a:lnTo>
+                  <a:lnTo>
+                    <a:pt x="5873047" y="2685734"/>
+                  </a:lnTo>
+                  <a:lnTo>
+                    <a:pt x="5801424" y="2679538"/>
+                  </a:lnTo>
+                  <a:lnTo>
+                    <a:pt x="5729802" y="2672939"/>
+                  </a:lnTo>
+                  <a:lnTo>
+                    <a:pt x="5658179" y="2665909"/>
+                  </a:lnTo>
+                  <a:lnTo>
+                    <a:pt x="5586557" y="2658421"/>
+                  </a:lnTo>
+                  <a:lnTo>
+                    <a:pt x="5514934" y="2650444"/>
+                  </a:lnTo>
+                  <a:lnTo>
+                    <a:pt x="5443311" y="2641948"/>
+                  </a:lnTo>
+                  <a:lnTo>
+                    <a:pt x="5371689" y="2632898"/>
+                  </a:lnTo>
+                  <a:lnTo>
+                    <a:pt x="5300066" y="2623257"/>
+                  </a:lnTo>
+                  <a:lnTo>
+                    <a:pt x="5228444" y="2612989"/>
+                  </a:lnTo>
+                  <a:lnTo>
+                    <a:pt x="5156821" y="2602050"/>
+                  </a:lnTo>
+                  <a:lnTo>
+                    <a:pt x="5085199" y="2590399"/>
+                  </a:lnTo>
+                  <a:lnTo>
+                    <a:pt x="5013576" y="2577988"/>
+                  </a:lnTo>
+                  <a:lnTo>
+                    <a:pt x="4941954" y="2564768"/>
+                  </a:lnTo>
+                  <a:lnTo>
+                    <a:pt x="4870331" y="2550686"/>
+                  </a:lnTo>
+                  <a:lnTo>
+                    <a:pt x="4798709" y="2535686"/>
+                  </a:lnTo>
+                  <a:lnTo>
+                    <a:pt x="4727086" y="2519708"/>
+                  </a:lnTo>
+                  <a:lnTo>
+                    <a:pt x="4655464" y="2502689"/>
+                  </a:lnTo>
+                  <a:lnTo>
+                    <a:pt x="4583841" y="2484560"/>
+                  </a:lnTo>
+                  <a:lnTo>
+                    <a:pt x="4512219" y="2465249"/>
+                  </a:lnTo>
+                  <a:lnTo>
+                    <a:pt x="4440596" y="2444679"/>
+                  </a:lnTo>
+                  <a:lnTo>
+                    <a:pt x="4368974" y="2422768"/>
+                  </a:lnTo>
+                  <a:lnTo>
+                    <a:pt x="4297351" y="2399428"/>
+                  </a:lnTo>
+                  <a:lnTo>
+                    <a:pt x="4225729" y="2374567"/>
+                  </a:lnTo>
+                  <a:lnTo>
+                    <a:pt x="4154106" y="2348085"/>
+                  </a:lnTo>
+                  <a:lnTo>
+                    <a:pt x="4082483" y="2319877"/>
+                  </a:lnTo>
+                  <a:lnTo>
+                    <a:pt x="4010861" y="2289830"/>
+                  </a:lnTo>
+                  <a:lnTo>
+                    <a:pt x="3939238" y="2257824"/>
+                  </a:lnTo>
+                  <a:lnTo>
+                    <a:pt x="3867616" y="2223731"/>
+                  </a:lnTo>
+                  <a:lnTo>
+                    <a:pt x="3795993" y="2187415"/>
+                  </a:lnTo>
+                  <a:lnTo>
+                    <a:pt x="3724371" y="2148732"/>
+                  </a:lnTo>
+                  <a:lnTo>
+                    <a:pt x="3652748" y="2107528"/>
+                  </a:lnTo>
+                  <a:lnTo>
+                    <a:pt x="3581126" y="2063636"/>
+                  </a:lnTo>
+                  <a:lnTo>
+                    <a:pt x="3509503" y="2016884"/>
+                  </a:lnTo>
+                  <a:lnTo>
+                    <a:pt x="3437881" y="1967083"/>
+                  </a:lnTo>
+                  <a:lnTo>
+                    <a:pt x="3366258" y="1936535"/>
+                  </a:lnTo>
+                  <a:lnTo>
+                    <a:pt x="3294636" y="1914849"/>
+                  </a:lnTo>
+                  <a:lnTo>
+                    <a:pt x="3223013" y="1892606"/>
+                  </a:lnTo>
+                  <a:lnTo>
+                    <a:pt x="3151391" y="1869792"/>
+                  </a:lnTo>
+                  <a:lnTo>
+                    <a:pt x="3079768" y="1846391"/>
+                  </a:lnTo>
+                  <a:lnTo>
+                    <a:pt x="3008146" y="1822390"/>
+                  </a:lnTo>
+                  <a:lnTo>
+                    <a:pt x="2936523" y="1797772"/>
+                  </a:lnTo>
+                  <a:lnTo>
+                    <a:pt x="2864901" y="1772521"/>
+                  </a:lnTo>
+                  <a:lnTo>
+                    <a:pt x="2793278" y="1746622"/>
+                  </a:lnTo>
+                  <a:lnTo>
+                    <a:pt x="2721655" y="1720058"/>
+                  </a:lnTo>
+                  <a:lnTo>
+                    <a:pt x="2650033" y="1692811"/>
+                  </a:lnTo>
+                  <a:lnTo>
+                    <a:pt x="2578410" y="1664864"/>
+                  </a:lnTo>
+                  <a:lnTo>
+                    <a:pt x="2506788" y="1636200"/>
+                  </a:lnTo>
+                  <a:lnTo>
+                    <a:pt x="2435165" y="1606799"/>
+                  </a:lnTo>
+                  <a:lnTo>
+                    <a:pt x="2363543" y="1576643"/>
+                  </a:lnTo>
+                  <a:lnTo>
+                    <a:pt x="2291920" y="1545712"/>
+                  </a:lnTo>
+                  <a:lnTo>
+                    <a:pt x="2220298" y="1513987"/>
+                  </a:lnTo>
+                  <a:lnTo>
+                    <a:pt x="2148675" y="1481447"/>
+                  </a:lnTo>
+                  <a:lnTo>
+                    <a:pt x="2077053" y="1448071"/>
+                  </a:lnTo>
+                  <a:lnTo>
+                    <a:pt x="2005430" y="1413838"/>
+                  </a:lnTo>
+                  <a:lnTo>
+                    <a:pt x="1933808" y="1378725"/>
+                  </a:lnTo>
+                  <a:lnTo>
+                    <a:pt x="1862185" y="1342711"/>
+                  </a:lnTo>
+                  <a:lnTo>
+                    <a:pt x="1790563" y="1305771"/>
+                  </a:lnTo>
+                  <a:lnTo>
+                    <a:pt x="1718940" y="1267882"/>
+                  </a:lnTo>
+                  <a:lnTo>
+                    <a:pt x="1647318" y="1229021"/>
+                  </a:lnTo>
+                  <a:lnTo>
+                    <a:pt x="1575695" y="1189160"/>
+                  </a:lnTo>
+                  <a:lnTo>
+                    <a:pt x="1504073" y="1148276"/>
+                  </a:lnTo>
+                  <a:lnTo>
+                    <a:pt x="1432450" y="1106342"/>
+                  </a:lnTo>
+                  <a:lnTo>
+                    <a:pt x="1360827" y="1063331"/>
+                  </a:lnTo>
+                  <a:lnTo>
+                    <a:pt x="1289205" y="1019215"/>
+                  </a:lnTo>
+                  <a:lnTo>
+                    <a:pt x="1217582" y="973965"/>
+                  </a:lnTo>
+                  <a:lnTo>
+                    <a:pt x="1145960" y="927554"/>
+                  </a:lnTo>
+                  <a:lnTo>
+                    <a:pt x="1074337" y="879950"/>
+                  </a:lnTo>
+                  <a:lnTo>
+                    <a:pt x="1002715" y="831123"/>
+                  </a:lnTo>
+                  <a:lnTo>
+                    <a:pt x="931092" y="781042"/>
+                  </a:lnTo>
+                  <a:lnTo>
+                    <a:pt x="859470" y="729674"/>
+                  </a:lnTo>
+                  <a:lnTo>
+                    <a:pt x="787847" y="676988"/>
+                  </a:lnTo>
+                  <a:lnTo>
+                    <a:pt x="716225" y="622947"/>
+                  </a:lnTo>
+                  <a:lnTo>
+                    <a:pt x="644602" y="567519"/>
+                  </a:lnTo>
+                  <a:lnTo>
+                    <a:pt x="572980" y="510667"/>
+                  </a:lnTo>
+                  <a:lnTo>
+                    <a:pt x="501357" y="452354"/>
+                  </a:lnTo>
+                  <a:lnTo>
+                    <a:pt x="429735" y="392543"/>
+                  </a:lnTo>
+                  <a:lnTo>
+                    <a:pt x="358112" y="331197"/>
+                  </a:lnTo>
+                  <a:lnTo>
+                    <a:pt x="286490" y="268274"/>
+                  </a:lnTo>
+                  <a:lnTo>
+                    <a:pt x="214867" y="203735"/>
+                  </a:lnTo>
+                  <a:lnTo>
+                    <a:pt x="143245" y="137538"/>
+                  </a:lnTo>
+                  <a:lnTo>
+                    <a:pt x="71622" y="69641"/>
                   </a:lnTo>
                   <a:lnTo>
                     <a:pt x="0" y="0"/>
@@ -4096,267 +4096,267 @@
           </p:nvSpPr>
           <p:spPr>
             <a:xfrm>
-              <a:off x="2257643" y="2073503"/>
-              <a:ext cx="6005035" cy="3397408"/>
+              <a:off x="2266167" y="2073503"/>
+              <a:ext cx="5996511" cy="3398113"/>
             </a:xfrm>
             <a:custGeom>
               <a:avLst/>
               <a:pathLst>
-                <a:path w="6005035" h="3397408">
+                <a:path w="5996511" h="3398113">
                   <a:moveTo>
                     <a:pt x="0" y="0"/>
                   </a:moveTo>
                   <a:lnTo>
-                    <a:pt x="60366" y="127538"/>
-                  </a:lnTo>
-                  <a:lnTo>
-                    <a:pt x="131988" y="272331"/>
-                  </a:lnTo>
-                  <a:lnTo>
-                    <a:pt x="203611" y="410877"/>
-                  </a:lnTo>
-                  <a:lnTo>
-                    <a:pt x="275233" y="543445"/>
-                  </a:lnTo>
-                  <a:lnTo>
-                    <a:pt x="346856" y="670295"/>
-                  </a:lnTo>
-                  <a:lnTo>
-                    <a:pt x="418478" y="791672"/>
-                  </a:lnTo>
-                  <a:lnTo>
-                    <a:pt x="490101" y="907812"/>
-                  </a:lnTo>
-                  <a:lnTo>
-                    <a:pt x="561723" y="1018943"/>
-                  </a:lnTo>
-                  <a:lnTo>
-                    <a:pt x="633346" y="1125278"/>
-                  </a:lnTo>
-                  <a:lnTo>
-                    <a:pt x="704968" y="1227027"/>
-                  </a:lnTo>
-                  <a:lnTo>
-                    <a:pt x="776591" y="1324385"/>
-                  </a:lnTo>
-                  <a:lnTo>
-                    <a:pt x="848214" y="1417544"/>
-                  </a:lnTo>
-                  <a:lnTo>
-                    <a:pt x="919836" y="1506683"/>
-                  </a:lnTo>
-                  <a:lnTo>
-                    <a:pt x="991459" y="1591977"/>
-                  </a:lnTo>
-                  <a:lnTo>
-                    <a:pt x="1063081" y="1673591"/>
-                  </a:lnTo>
-                  <a:lnTo>
-                    <a:pt x="1134704" y="1751684"/>
-                  </a:lnTo>
-                  <a:lnTo>
-                    <a:pt x="1206326" y="1826408"/>
-                  </a:lnTo>
-                  <a:lnTo>
-                    <a:pt x="1277949" y="1897908"/>
-                  </a:lnTo>
-                  <a:lnTo>
-                    <a:pt x="1349571" y="1966324"/>
-                  </a:lnTo>
-                  <a:lnTo>
-                    <a:pt x="1421194" y="2031788"/>
-                  </a:lnTo>
-                  <a:lnTo>
-                    <a:pt x="1492816" y="2094428"/>
-                  </a:lnTo>
-                  <a:lnTo>
-                    <a:pt x="1564439" y="2154366"/>
-                  </a:lnTo>
-                  <a:lnTo>
-                    <a:pt x="1636061" y="2211717"/>
-                  </a:lnTo>
-                  <a:lnTo>
-                    <a:pt x="1707684" y="2266595"/>
-                  </a:lnTo>
-                  <a:lnTo>
-                    <a:pt x="1779306" y="2319105"/>
-                  </a:lnTo>
-                  <a:lnTo>
-                    <a:pt x="1850929" y="2369349"/>
-                  </a:lnTo>
-                  <a:lnTo>
-                    <a:pt x="1922551" y="2417426"/>
-                  </a:lnTo>
-                  <a:lnTo>
-                    <a:pt x="1994174" y="2463429"/>
-                  </a:lnTo>
-                  <a:lnTo>
-                    <a:pt x="2065796" y="2507447"/>
-                  </a:lnTo>
-                  <a:lnTo>
-                    <a:pt x="2137419" y="2549566"/>
-                  </a:lnTo>
-                  <a:lnTo>
-                    <a:pt x="2209042" y="2589869"/>
-                  </a:lnTo>
-                  <a:lnTo>
-                    <a:pt x="2280664" y="2628432"/>
-                  </a:lnTo>
-                  <a:lnTo>
-                    <a:pt x="2352287" y="2665332"/>
-                  </a:lnTo>
-                  <a:lnTo>
-                    <a:pt x="2423909" y="2700639"/>
-                  </a:lnTo>
-                  <a:lnTo>
-                    <a:pt x="2495532" y="2734424"/>
-                  </a:lnTo>
-                  <a:lnTo>
-                    <a:pt x="2567154" y="2766751"/>
-                  </a:lnTo>
-                  <a:lnTo>
-                    <a:pt x="2638777" y="2797683"/>
-                  </a:lnTo>
-                  <a:lnTo>
-                    <a:pt x="2710399" y="2827281"/>
-                  </a:lnTo>
-                  <a:lnTo>
-                    <a:pt x="2782022" y="2855602"/>
-                  </a:lnTo>
-                  <a:lnTo>
-                    <a:pt x="2853644" y="2882701"/>
-                  </a:lnTo>
-                  <a:lnTo>
-                    <a:pt x="2925267" y="2908632"/>
-                  </a:lnTo>
-                  <a:lnTo>
-                    <a:pt x="2996889" y="2933443"/>
-                  </a:lnTo>
-                  <a:lnTo>
-                    <a:pt x="3068512" y="2957184"/>
-                  </a:lnTo>
-                  <a:lnTo>
-                    <a:pt x="3140134" y="2979901"/>
-                  </a:lnTo>
-                  <a:lnTo>
-                    <a:pt x="3211757" y="3001637"/>
-                  </a:lnTo>
-                  <a:lnTo>
-                    <a:pt x="3283379" y="3022436"/>
-                  </a:lnTo>
-                  <a:lnTo>
-                    <a:pt x="3355002" y="3042338"/>
-                  </a:lnTo>
-                  <a:lnTo>
-                    <a:pt x="3426624" y="3061381"/>
-                  </a:lnTo>
-                  <a:lnTo>
-                    <a:pt x="3498247" y="3079603"/>
-                  </a:lnTo>
-                  <a:lnTo>
-                    <a:pt x="3569870" y="3097038"/>
-                  </a:lnTo>
-                  <a:lnTo>
-                    <a:pt x="3641492" y="3113721"/>
-                  </a:lnTo>
-                  <a:lnTo>
-                    <a:pt x="3713115" y="3129685"/>
-                  </a:lnTo>
-                  <a:lnTo>
-                    <a:pt x="3784737" y="3144960"/>
-                  </a:lnTo>
-                  <a:lnTo>
-                    <a:pt x="3856360" y="3159576"/>
-                  </a:lnTo>
-                  <a:lnTo>
-                    <a:pt x="3927982" y="3173561"/>
-                  </a:lnTo>
-                  <a:lnTo>
-                    <a:pt x="3999605" y="3186943"/>
-                  </a:lnTo>
-                  <a:lnTo>
-                    <a:pt x="4071227" y="3199747"/>
-                  </a:lnTo>
-                  <a:lnTo>
-                    <a:pt x="4142850" y="3212000"/>
-                  </a:lnTo>
-                  <a:lnTo>
-                    <a:pt x="4214472" y="3223723"/>
-                  </a:lnTo>
-                  <a:lnTo>
-                    <a:pt x="4286095" y="3234941"/>
-                  </a:lnTo>
-                  <a:lnTo>
-                    <a:pt x="4357717" y="3245675"/>
-                  </a:lnTo>
-                  <a:lnTo>
-                    <a:pt x="4429340" y="3255946"/>
-                  </a:lnTo>
-                  <a:lnTo>
-                    <a:pt x="4500962" y="3265773"/>
-                  </a:lnTo>
-                  <a:lnTo>
-                    <a:pt x="4572585" y="3275177"/>
-                  </a:lnTo>
-                  <a:lnTo>
-                    <a:pt x="4644207" y="3284175"/>
-                  </a:lnTo>
-                  <a:lnTo>
-                    <a:pt x="4715830" y="3292785"/>
-                  </a:lnTo>
-                  <a:lnTo>
-                    <a:pt x="4787452" y="3301023"/>
-                  </a:lnTo>
-                  <a:lnTo>
-                    <a:pt x="4859075" y="3308906"/>
-                  </a:lnTo>
-                  <a:lnTo>
-                    <a:pt x="4930698" y="3316449"/>
-                  </a:lnTo>
-                  <a:lnTo>
-                    <a:pt x="5002320" y="3323667"/>
-                  </a:lnTo>
-                  <a:lnTo>
-                    <a:pt x="5073943" y="3330573"/>
-                  </a:lnTo>
-                  <a:lnTo>
-                    <a:pt x="5145565" y="3337181"/>
-                  </a:lnTo>
-                  <a:lnTo>
-                    <a:pt x="5217188" y="3343504"/>
-                  </a:lnTo>
-                  <a:lnTo>
-                    <a:pt x="5288810" y="3349554"/>
-                  </a:lnTo>
-                  <a:lnTo>
-                    <a:pt x="5360433" y="3355344"/>
-                  </a:lnTo>
-                  <a:lnTo>
-                    <a:pt x="5432055" y="3360883"/>
-                  </a:lnTo>
-                  <a:lnTo>
-                    <a:pt x="5503678" y="3366184"/>
-                  </a:lnTo>
-                  <a:lnTo>
-                    <a:pt x="5575300" y="3371256"/>
-                  </a:lnTo>
-                  <a:lnTo>
-                    <a:pt x="5646923" y="3376109"/>
-                  </a:lnTo>
-                  <a:lnTo>
-                    <a:pt x="5718545" y="3380752"/>
-                  </a:lnTo>
-                  <a:lnTo>
-                    <a:pt x="5790168" y="3385196"/>
-                  </a:lnTo>
-                  <a:lnTo>
-                    <a:pt x="5861790" y="3389447"/>
-                  </a:lnTo>
-                  <a:lnTo>
-                    <a:pt x="5933413" y="3393515"/>
-                  </a:lnTo>
-                  <a:lnTo>
-                    <a:pt x="6005035" y="3397408"/>
+                    <a:pt x="51842" y="110493"/>
+                  </a:lnTo>
+                  <a:lnTo>
+                    <a:pt x="123464" y="256537"/>
+                  </a:lnTo>
+                  <a:lnTo>
+                    <a:pt x="195087" y="396257"/>
+                  </a:lnTo>
+                  <a:lnTo>
+                    <a:pt x="266709" y="529929"/>
+                  </a:lnTo>
+                  <a:lnTo>
+                    <a:pt x="338332" y="657813"/>
+                  </a:lnTo>
+                  <a:lnTo>
+                    <a:pt x="409954" y="780161"/>
+                  </a:lnTo>
+                  <a:lnTo>
+                    <a:pt x="481577" y="897211"/>
+                  </a:lnTo>
+                  <a:lnTo>
+                    <a:pt x="553199" y="1009194"/>
+                  </a:lnTo>
+                  <a:lnTo>
+                    <a:pt x="624822" y="1116329"/>
+                  </a:lnTo>
+                  <a:lnTo>
+                    <a:pt x="696444" y="1218825"/>
+                  </a:lnTo>
+                  <a:lnTo>
+                    <a:pt x="768067" y="1316884"/>
+                  </a:lnTo>
+                  <a:lnTo>
+                    <a:pt x="839689" y="1410698"/>
+                  </a:lnTo>
+                  <a:lnTo>
+                    <a:pt x="911312" y="1500450"/>
+                  </a:lnTo>
+                  <a:lnTo>
+                    <a:pt x="982934" y="1586316"/>
+                  </a:lnTo>
+                  <a:lnTo>
+                    <a:pt x="1054557" y="1668464"/>
+                  </a:lnTo>
+                  <a:lnTo>
+                    <a:pt x="1126179" y="1747056"/>
+                  </a:lnTo>
+                  <a:lnTo>
+                    <a:pt x="1197802" y="1822245"/>
+                  </a:lnTo>
+                  <a:lnTo>
+                    <a:pt x="1269424" y="1894179"/>
+                  </a:lnTo>
+                  <a:lnTo>
+                    <a:pt x="1341047" y="1962999"/>
+                  </a:lnTo>
+                  <a:lnTo>
+                    <a:pt x="1412670" y="2028839"/>
+                  </a:lnTo>
+                  <a:lnTo>
+                    <a:pt x="1484292" y="2091829"/>
+                  </a:lnTo>
+                  <a:lnTo>
+                    <a:pt x="1555915" y="2152091"/>
+                  </a:lnTo>
+                  <a:lnTo>
+                    <a:pt x="1627537" y="2209745"/>
+                  </a:lnTo>
+                  <a:lnTo>
+                    <a:pt x="1699160" y="2264902"/>
+                  </a:lnTo>
+                  <a:lnTo>
+                    <a:pt x="1770782" y="2317671"/>
+                  </a:lnTo>
+                  <a:lnTo>
+                    <a:pt x="1842405" y="2368156"/>
+                  </a:lnTo>
+                  <a:lnTo>
+                    <a:pt x="1914027" y="2416455"/>
+                  </a:lnTo>
+                  <a:lnTo>
+                    <a:pt x="1985650" y="2462663"/>
+                  </a:lnTo>
+                  <a:lnTo>
+                    <a:pt x="2057272" y="2506870"/>
+                  </a:lnTo>
+                  <a:lnTo>
+                    <a:pt x="2128895" y="2549164"/>
+                  </a:lnTo>
+                  <a:lnTo>
+                    <a:pt x="2200517" y="2589626"/>
+                  </a:lnTo>
+                  <a:lnTo>
+                    <a:pt x="2272140" y="2628337"/>
+                  </a:lnTo>
+                  <a:lnTo>
+                    <a:pt x="2343762" y="2665371"/>
+                  </a:lnTo>
+                  <a:lnTo>
+                    <a:pt x="2415385" y="2700803"/>
+                  </a:lnTo>
+                  <a:lnTo>
+                    <a:pt x="2487007" y="2734700"/>
+                  </a:lnTo>
+                  <a:lnTo>
+                    <a:pt x="2558630" y="2767130"/>
+                  </a:lnTo>
+                  <a:lnTo>
+                    <a:pt x="2630252" y="2798155"/>
+                  </a:lnTo>
+                  <a:lnTo>
+                    <a:pt x="2701875" y="2827838"/>
+                  </a:lnTo>
+                  <a:lnTo>
+                    <a:pt x="2773498" y="2856235"/>
+                  </a:lnTo>
+                  <a:lnTo>
+                    <a:pt x="2845120" y="2883403"/>
+                  </a:lnTo>
+                  <a:lnTo>
+                    <a:pt x="2916743" y="2909394"/>
+                  </a:lnTo>
+                  <a:lnTo>
+                    <a:pt x="2988365" y="2934261"/>
+                  </a:lnTo>
+                  <a:lnTo>
+                    <a:pt x="3059988" y="2958050"/>
+                  </a:lnTo>
+                  <a:lnTo>
+                    <a:pt x="3131610" y="2980810"/>
+                  </a:lnTo>
+                  <a:lnTo>
+                    <a:pt x="3203233" y="3002585"/>
+                  </a:lnTo>
+                  <a:lnTo>
+                    <a:pt x="3274855" y="3023416"/>
+                  </a:lnTo>
+                  <a:lnTo>
+                    <a:pt x="3346478" y="3043346"/>
+                  </a:lnTo>
+                  <a:lnTo>
+                    <a:pt x="3418100" y="3062413"/>
+                  </a:lnTo>
+                  <a:lnTo>
+                    <a:pt x="3489723" y="3080655"/>
+                  </a:lnTo>
+                  <a:lnTo>
+                    <a:pt x="3561345" y="3098106"/>
+                  </a:lnTo>
+                  <a:lnTo>
+                    <a:pt x="3632968" y="3114802"/>
+                  </a:lnTo>
+                  <a:lnTo>
+                    <a:pt x="3704590" y="3130776"/>
+                  </a:lnTo>
+                  <a:lnTo>
+                    <a:pt x="3776213" y="3146057"/>
+                  </a:lnTo>
+                  <a:lnTo>
+                    <a:pt x="3847835" y="3160677"/>
+                  </a:lnTo>
+                  <a:lnTo>
+                    <a:pt x="3919458" y="3174665"/>
+                  </a:lnTo>
+                  <a:lnTo>
+                    <a:pt x="3991080" y="3188046"/>
+                  </a:lnTo>
+                  <a:lnTo>
+                    <a:pt x="4062703" y="3200848"/>
+                  </a:lnTo>
+                  <a:lnTo>
+                    <a:pt x="4134326" y="3213096"/>
+                  </a:lnTo>
+                  <a:lnTo>
+                    <a:pt x="4205948" y="3224814"/>
+                  </a:lnTo>
+                  <a:lnTo>
+                    <a:pt x="4277571" y="3236024"/>
+                  </a:lnTo>
+                  <a:lnTo>
+                    <a:pt x="4349193" y="3246749"/>
+                  </a:lnTo>
+                  <a:lnTo>
+                    <a:pt x="4420816" y="3257010"/>
+                  </a:lnTo>
+                  <a:lnTo>
+                    <a:pt x="4492438" y="3266827"/>
+                  </a:lnTo>
+                  <a:lnTo>
+                    <a:pt x="4564061" y="3276218"/>
+                  </a:lnTo>
+                  <a:lnTo>
+                    <a:pt x="4635683" y="3285203"/>
+                  </a:lnTo>
+                  <a:lnTo>
+                    <a:pt x="4707306" y="3293799"/>
+                  </a:lnTo>
+                  <a:lnTo>
+                    <a:pt x="4778928" y="3302022"/>
+                  </a:lnTo>
+                  <a:lnTo>
+                    <a:pt x="4850551" y="3309890"/>
+                  </a:lnTo>
+                  <a:lnTo>
+                    <a:pt x="4922173" y="3317417"/>
+                  </a:lnTo>
+                  <a:lnTo>
+                    <a:pt x="4993796" y="3324618"/>
+                  </a:lnTo>
+                  <a:lnTo>
+                    <a:pt x="5065418" y="3331508"/>
+                  </a:lnTo>
+                  <a:lnTo>
+                    <a:pt x="5137041" y="3338099"/>
+                  </a:lnTo>
+                  <a:lnTo>
+                    <a:pt x="5208663" y="3344405"/>
+                  </a:lnTo>
+                  <a:lnTo>
+                    <a:pt x="5280286" y="3350437"/>
+                  </a:lnTo>
+                  <a:lnTo>
+                    <a:pt x="5351908" y="3356209"/>
+                  </a:lnTo>
+                  <a:lnTo>
+                    <a:pt x="5423531" y="3361731"/>
+                  </a:lnTo>
+                  <a:lnTo>
+                    <a:pt x="5495154" y="3367013"/>
+                  </a:lnTo>
+                  <a:lnTo>
+                    <a:pt x="5566776" y="3372067"/>
+                  </a:lnTo>
+                  <a:lnTo>
+                    <a:pt x="5638399" y="3376902"/>
+                  </a:lnTo>
+                  <a:lnTo>
+                    <a:pt x="5710021" y="3381528"/>
+                  </a:lnTo>
+                  <a:lnTo>
+                    <a:pt x="5781644" y="3385953"/>
+                  </a:lnTo>
+                  <a:lnTo>
+                    <a:pt x="5853266" y="3390187"/>
+                  </a:lnTo>
+                  <a:lnTo>
+                    <a:pt x="5924889" y="3394238"/>
+                  </a:lnTo>
+                  <a:lnTo>
+                    <a:pt x="5996511" y="3398113"/>
                   </a:lnTo>
                 </a:path>
               </a:pathLst>
@@ -4964,7 +4964,7 @@
                   <a:latin typeface="Helvetica"/>
                   <a:cs typeface="Helvetica"/>
                 </a:rPr>
-                <a:t>HR per 10 % decline: 1.70 (1.35-2.13), p_Bonf = &lt;0.001 (n = 6)  |  per IQR decline (Δ = 29.3 %): 4.72 (2.43-9.16)  |  IQR: [-14.6, 14.7] %</a:t>
+                <a:t>HR per 10 % decline: 1.70 (1.36-2.14), p_Bonf = &lt;0.001 (n = 6)  |  per IQR decline (Δ = 29.3 %): 4.74 (2.44-9.22)  |  IQR: [-14.6, 14.7] %</a:t>
               </a:r>
             </a:p>
           </p:txBody>
